--- a/ZEN_기술보고서.pptx
+++ b/ZEN_기술보고서.pptx
@@ -1871,7 +1871,7 @@
                 <a:ea typeface="Malgun Gothic" pitchFamily="34" charset="-122"/>
                 <a:cs typeface="Malgun Gothic" pitchFamily="34" charset="-120"/>
               </a:rPr>
-              <a:t>단일 HTML 6MB · 의존성 0</a:t>
+              <a:t>단일 HTML 6.5MB · 의존성 0</a:t>
             </a:r>
             <a:endParaRPr lang="en-US" sz="1350" dirty="0"/>
           </a:p>
@@ -2326,7 +2326,7 @@
                 <a:ea typeface="Malgun Gothic" pitchFamily="34" charset="-122"/>
                 <a:cs typeface="Malgun Gothic" pitchFamily="34" charset="-120"/>
               </a:rPr>
-              <a:t>단일 HTML 6.1MB · 바닐라 JS · 의존성 0 · 생성형 AI 페어 개발</a:t>
+              <a:t>단일 HTML 6.5MB · 바닐라 JS · 의존성 0 · 생성형 AI 페어 개발</a:t>
             </a:r>
             <a:endParaRPr lang="en-US" sz="1350" dirty="0"/>
           </a:p>
@@ -4419,7 +4419,7 @@
                 <a:ea typeface="Malgun Gothic" pitchFamily="34" charset="-122"/>
                 <a:cs typeface="Malgun Gothic" pitchFamily="34" charset="-120"/>
               </a:rPr>
-              <a:t>플랫폼 전체가 HTML 6.1MB 한 개 — 서버·설치·계정 없이 더블클릭으로 실행</a:t>
+              <a:t>플랫폼 전체가 HTML 6.5MB 한 개 — 서버·설치·계정 없이 더블클릭으로 실행 (현장 앱 5종 내장)</a:t>
             </a:r>
             <a:endParaRPr lang="en-US" sz="1100" dirty="0"/>
           </a:p>
@@ -5073,7 +5073,7 @@
               </a:rPr>
               <a:t>{id:'R-01', agent:'인력',
  cond:'부하율 = 계획량 ÷ 인력 주CAPA',
- th:'&gt; 140%', judge:'인력 부족',
+ th:'≥ 100%', judge:'과부하 · 인력 부족',
  act:'여유 그룹 재배치 · 필요 T/O 산출'},
 </a:t>
             </a:r>
@@ -8516,7 +8516,7 @@
                 <a:ea typeface="Malgun Gothic" pitchFamily="34" charset="-122"/>
                 <a:cs typeface="Malgun Gothic" pitchFamily="34" charset="-120"/>
               </a:rPr>
-              <a:t>확장 설계 — 다음 단계까지 코드로 준비 완료</a:t>
+              <a:t>확장 설계 — 실시간 연동은 가동, 복제는 준비 완료</a:t>
             </a:r>
             <a:endParaRPr lang="en-US" sz="2900" dirty="0"/>
           </a:p>
@@ -8582,7 +8582,7 @@
                 <a:ea typeface="Malgun Gothic" pitchFamily="34" charset="-122"/>
                 <a:cs typeface="Malgun Gothic" pitchFamily="34" charset="-120"/>
               </a:rPr>
-              <a:t>통합 API Worker</a:t>
+              <a:t>현장 앱 실시간 연동</a:t>
             </a:r>
             <a:endParaRPr lang="en-US" sz="1450" dirty="0"/>
           </a:p>
@@ -8624,7 +8624,7 @@
                 <a:ea typeface="Malgun Gothic" pitchFamily="34" charset="-122"/>
                 <a:cs typeface="Malgun Gothic" pitchFamily="34" charset="-120"/>
               </a:rPr>
-              <a:t>zen-integration-api — /today(통합 JSON)·/brief(브리핑) 구현 완료, 배포 대기</a:t>
+              <a:t>간접작업 실적 · 세척실 · 기상 실황 · 창고 적치 4종을 60초 주기로 직접 수신 — 단절 시 기준값 유지</a:t>
             </a:r>
             <a:endParaRPr lang="en-US" sz="1150" dirty="0"/>
           </a:p>
@@ -8685,7 +8685,7 @@
                 <a:ea typeface="Malgun Gothic" pitchFamily="34" charset="-122"/>
                 <a:cs typeface="Malgun Gothic" pitchFamily="34" charset="-120"/>
               </a:rPr>
-              <a:t>코드 완성</a:t>
+              <a:t>가동 중</a:t>
             </a:r>
             <a:endParaRPr lang="en-US" sz="1050" dirty="0"/>
           </a:p>
@@ -8751,7 +8751,7 @@
                 <a:ea typeface="Malgun Gothic" pitchFamily="34" charset="-122"/>
                 <a:cs typeface="Malgun Gothic" pitchFamily="34" charset="-120"/>
               </a:rPr>
-              <a:t>라이브 연결 토글</a:t>
+              <a:t>연결 실패 시 폴백</a:t>
             </a:r>
             <a:endParaRPr lang="en-US" sz="1450" dirty="0"/>
           </a:p>
@@ -8793,7 +8793,7 @@
                 <a:ea typeface="Malgun Gothic" pitchFamily="34" charset="-122"/>
                 <a:cs typeface="Malgun Gothic" pitchFamily="34" charset="-120"/>
               </a:rPr>
-              <a:t>플랫폼에 스냅샷 ↔ 실시간 전환 스위치 내장 — URL만 넣으면 라이브</a:t>
+              <a:t>주소 미등록·서버 단절 시 기준값으로 자동 전환 · 연결 상태를 판단 근거에 함께 표시</a:t>
             </a:r>
             <a:endParaRPr lang="en-US" sz="1150" dirty="0"/>
           </a:p>
@@ -8854,7 +8854,7 @@
                 <a:ea typeface="Malgun Gothic" pitchFamily="34" charset="-122"/>
                 <a:cs typeface="Malgun Gothic" pitchFamily="34" charset="-120"/>
               </a:rPr>
-              <a:t>내장 완료</a:t>
+              <a:t>자동 전환</a:t>
             </a:r>
             <a:endParaRPr lang="en-US" sz="1050" dirty="0"/>
           </a:p>
@@ -9131,7 +9131,7 @@
                 <a:ea typeface="Malgun Gothic" pitchFamily="34" charset="-122"/>
                 <a:cs typeface="Malgun Gothic" pitchFamily="34" charset="-120"/>
               </a:rPr>
-              <a:t>세척실·오리콘 실배포 URL 등록 슬롯 — 등록 즉시 임베드 전환</a:t>
+              <a:t>현장 앱 5종을 플랫폼에 내장(gzip) — 폐쇄망에서도 역할별(현장/관리자) 화면 그대로 실행</a:t>
             </a:r>
             <a:endParaRPr lang="en-US" sz="1150" dirty="0"/>
           </a:p>
@@ -9192,7 +9192,7 @@
                 <a:ea typeface="Malgun Gothic" pitchFamily="34" charset="-122"/>
                 <a:cs typeface="Malgun Gothic" pitchFamily="34" charset="-120"/>
               </a:rPr>
-              <a:t>슬롯 준비</a:t>
+              <a:t>내장 완료</a:t>
             </a:r>
             <a:endParaRPr lang="en-US" sz="1050" dirty="0"/>
           </a:p>

--- a/ZEN_기술보고서.pptx
+++ b/ZEN_기술보고서.pptx
@@ -7967,7 +7967,7 @@
                 <a:ea typeface="Malgun Gothic" pitchFamily="34" charset="-122"/>
                 <a:cs typeface="Malgun Gothic" pitchFamily="34" charset="-120"/>
               </a:rPr>
-              <a:t>탐지→조치→결과</a:t>
+              <a:t>탐지→조치→결과 검증</a:t>
             </a:r>
             <a:endParaRPr lang="en-US" sz="1150" dirty="0"/>
           </a:p>
@@ -8009,7 +8009,7 @@
                 <a:ea typeface="Malgun Gothic" pitchFamily="34" charset="-122"/>
                 <a:cs typeface="Malgun Gothic" pitchFamily="34" charset="-120"/>
               </a:rPr>
-              <a:t>승인/전달/완료 상태 + 조치 문안 — localStorage 영속</a:t>
+              <a:t>회차별 append-only 누적 — 조치 내용·담당·소요시간·결과(효과 확인/효과 없음/재발)</a:t>
             </a:r>
             <a:endParaRPr lang="en-US" sz="1100" dirty="0"/>
           </a:p>
